--- a/La-Vallee-de-la-Vision-Etude-biblique.pptx
+++ b/La-Vallee-de-la-Vision-Etude-biblique.pptx
@@ -136,7 +136,7 @@
   <pc:docChgLst>
     <pc:chgData name="André-Guy Bruneau" userId="c9f3b82d5570fc32" providerId="LiveId" clId="{C4496A7D-9A64-4B82-9835-F710A7718518}"/>
     <pc:docChg chg="undo custSel addSld delSld modSld">
-      <pc:chgData name="André-Guy Bruneau" userId="c9f3b82d5570fc32" providerId="LiveId" clId="{C4496A7D-9A64-4B82-9835-F710A7718518}" dt="2026-06-25T12:51:39.399" v="710" actId="20577"/>
+      <pc:chgData name="André-Guy Bruneau" userId="c9f3b82d5570fc32" providerId="LiveId" clId="{C4496A7D-9A64-4B82-9835-F710A7718518}" dt="2026-06-25T12:55:55.639" v="783" actId="20577"/>
       <pc:docMkLst>
         <pc:docMk/>
       </pc:docMkLst>
@@ -576,7 +576,7 @@
         </pc:spChg>
       </pc:sldChg>
       <pc:sldChg chg="modSp add mod">
-        <pc:chgData name="André-Guy Bruneau" userId="c9f3b82d5570fc32" providerId="LiveId" clId="{C4496A7D-9A64-4B82-9835-F710A7718518}" dt="2026-06-25T12:51:39.399" v="710" actId="20577"/>
+        <pc:chgData name="André-Guy Bruneau" userId="c9f3b82d5570fc32" providerId="LiveId" clId="{C4496A7D-9A64-4B82-9835-F710A7718518}" dt="2026-06-25T12:55:55.639" v="783" actId="20577"/>
         <pc:sldMkLst>
           <pc:docMk/>
           <pc:sldMk cId="70202141" sldId="293"/>
@@ -590,7 +590,7 @@
           </ac:spMkLst>
         </pc:spChg>
         <pc:spChg chg="mod">
-          <ac:chgData name="André-Guy Bruneau" userId="c9f3b82d5570fc32" providerId="LiveId" clId="{C4496A7D-9A64-4B82-9835-F710A7718518}" dt="2026-06-25T12:51:39.399" v="710" actId="20577"/>
+          <ac:chgData name="André-Guy Bruneau" userId="c9f3b82d5570fc32" providerId="LiveId" clId="{C4496A7D-9A64-4B82-9835-F710A7718518}" dt="2026-06-25T12:55:55.639" v="783" actId="20577"/>
           <ac:spMkLst>
             <pc:docMk/>
             <pc:sldMk cId="70202141" sldId="293"/>
@@ -9698,7 +9698,7 @@
                 <a:ea typeface="Cambria" pitchFamily="34" charset="-122"/>
                 <a:cs typeface="Cambria" pitchFamily="34" charset="-120"/>
               </a:rPr>
-              <a:t>la litanie résume l'inversion évangélique : le chemin de l'abaissement est celui de </a:t>
+              <a:t>la </a:t>
             </a:r>
             <a:r>
               <a:rPr lang="en-US" sz="1400" dirty="0" err="1">
@@ -9709,7 +9709,117 @@
                 <a:ea typeface="Cambria" pitchFamily="34" charset="-122"/>
                 <a:cs typeface="Cambria" pitchFamily="34" charset="-120"/>
               </a:rPr>
+              <a:t>prière</a:t>
+            </a:r>
+            <a:r>
+              <a:rPr lang="en-US" sz="1400" dirty="0">
+                <a:solidFill>
+                  <a:srgbClr val="F5EFE4"/>
+                </a:solidFill>
+                <a:latin typeface="Cambria" pitchFamily="34" charset="0"/>
+                <a:ea typeface="Cambria" pitchFamily="34" charset="-122"/>
+                <a:cs typeface="Cambria" pitchFamily="34" charset="-120"/>
+              </a:rPr>
+              <a:t> </a:t>
+            </a:r>
+            <a:r>
+              <a:rPr lang="en-US" sz="1400" dirty="0" err="1">
+                <a:solidFill>
+                  <a:srgbClr val="F5EFE4"/>
+                </a:solidFill>
+                <a:latin typeface="Cambria" pitchFamily="34" charset="0"/>
+                <a:ea typeface="Cambria" pitchFamily="34" charset="-122"/>
+                <a:cs typeface="Cambria" pitchFamily="34" charset="-120"/>
+              </a:rPr>
+              <a:t>liturgique</a:t>
+            </a:r>
+            <a:r>
+              <a:rPr lang="en-US" sz="1400" dirty="0">
+                <a:solidFill>
+                  <a:srgbClr val="F5EFE4"/>
+                </a:solidFill>
+                <a:latin typeface="Cambria" pitchFamily="34" charset="0"/>
+                <a:ea typeface="Cambria" pitchFamily="34" charset="-122"/>
+                <a:cs typeface="Cambria" pitchFamily="34" charset="-120"/>
+              </a:rPr>
+              <a:t> </a:t>
+            </a:r>
+            <a:r>
+              <a:rPr lang="en-US" sz="1400" dirty="0" err="1">
+                <a:solidFill>
+                  <a:srgbClr val="F5EFE4"/>
+                </a:solidFill>
+                <a:latin typeface="Cambria" pitchFamily="34" charset="0"/>
+                <a:ea typeface="Cambria" pitchFamily="34" charset="-122"/>
+                <a:cs typeface="Cambria" pitchFamily="34" charset="-120"/>
+              </a:rPr>
+              <a:t>résume</a:t>
+            </a:r>
+            <a:r>
+              <a:rPr lang="en-US" sz="1400" dirty="0">
+                <a:solidFill>
+                  <a:srgbClr val="F5EFE4"/>
+                </a:solidFill>
+                <a:latin typeface="Cambria" pitchFamily="34" charset="0"/>
+                <a:ea typeface="Cambria" pitchFamily="34" charset="-122"/>
+                <a:cs typeface="Cambria" pitchFamily="34" charset="-120"/>
+              </a:rPr>
+              <a:t> l'inversion </a:t>
+            </a:r>
+            <a:r>
+              <a:rPr lang="en-US" sz="1400" dirty="0" err="1">
+                <a:solidFill>
+                  <a:srgbClr val="F5EFE4"/>
+                </a:solidFill>
+                <a:latin typeface="Cambria" pitchFamily="34" charset="0"/>
+                <a:ea typeface="Cambria" pitchFamily="34" charset="-122"/>
+                <a:cs typeface="Cambria" pitchFamily="34" charset="-120"/>
+              </a:rPr>
+              <a:t>évangélique</a:t>
+            </a:r>
+            <a:r>
+              <a:rPr lang="en-US" sz="1400" dirty="0">
+                <a:solidFill>
+                  <a:srgbClr val="F5EFE4"/>
+                </a:solidFill>
+                <a:latin typeface="Cambria" pitchFamily="34" charset="0"/>
+                <a:ea typeface="Cambria" pitchFamily="34" charset="-122"/>
+                <a:cs typeface="Cambria" pitchFamily="34" charset="-120"/>
+              </a:rPr>
+              <a:t> ; le chemin de l'abaissement est celui de </a:t>
+            </a:r>
+            <a:r>
+              <a:rPr lang="en-US" sz="1400" dirty="0" err="1">
+                <a:solidFill>
+                  <a:srgbClr val="F5EFE4"/>
+                </a:solidFill>
+                <a:latin typeface="Cambria" pitchFamily="34" charset="0"/>
+                <a:ea typeface="Cambria" pitchFamily="34" charset="-122"/>
+                <a:cs typeface="Cambria" pitchFamily="34" charset="-120"/>
+              </a:rPr>
               <a:t>l'élévation</a:t>
+            </a:r>
+            <a:r>
+              <a:rPr lang="en-US" sz="1400" dirty="0">
+                <a:solidFill>
+                  <a:srgbClr val="F5EFE4"/>
+                </a:solidFill>
+                <a:latin typeface="Cambria" pitchFamily="34" charset="0"/>
+                <a:ea typeface="Cambria" pitchFamily="34" charset="-122"/>
+                <a:cs typeface="Cambria" pitchFamily="34" charset="-120"/>
+              </a:rPr>
+              <a:t> ; </a:t>
+            </a:r>
+            <a:r>
+              <a:rPr lang="en-US" sz="1400" dirty="0" err="1">
+                <a:solidFill>
+                  <a:srgbClr val="F5EFE4"/>
+                </a:solidFill>
+                <a:latin typeface="Cambria" pitchFamily="34" charset="0"/>
+                <a:ea typeface="Cambria" pitchFamily="34" charset="-122"/>
+                <a:cs typeface="Cambria" pitchFamily="34" charset="-120"/>
+              </a:rPr>
+              <a:t>humilité</a:t>
             </a:r>
             <a:r>
               <a:rPr lang="en-US" sz="1400" dirty="0">

--- a/La-Vallee-de-la-Vision-Etude-biblique.pptx
+++ b/La-Vallee-de-la-Vision-Etude-biblique.pptx
@@ -138,7 +138,7 @@
   <pc:docChgLst>
     <pc:chgData name="André-Guy Bruneau" userId="c9f3b82d5570fc32" providerId="LiveId" clId="{C4496A7D-9A64-4B82-9835-F710A7718518}"/>
     <pc:docChg chg="undo custSel addSld delSld modSld">
-      <pc:chgData name="André-Guy Bruneau" userId="c9f3b82d5570fc32" providerId="LiveId" clId="{C4496A7D-9A64-4B82-9835-F710A7718518}" dt="2026-06-27T23:34:53" v="1883"/>
+      <pc:chgData name="André-Guy Bruneau" userId="c9f3b82d5570fc32" providerId="LiveId" clId="{C4496A7D-9A64-4B82-9835-F710A7718518}" dt="2026-06-28T11:12:33.115" v="1984" actId="122"/>
       <pc:docMkLst>
         <pc:docMk/>
       </pc:docMkLst>
@@ -276,14 +276,6 @@
           <pc:docMk/>
           <pc:sldMk cId="362923616" sldId="294"/>
         </pc:sldMkLst>
-        <pc:spChg chg="mod">
-          <ac:chgData name="André-Guy Bruneau" userId="c9f3b82d5570fc32" providerId="LiveId" clId="{C4496A7D-9A64-4B82-9835-F710A7718518}" dt="2026-06-26T11:16:36.993" v="784" actId="255"/>
-          <ac:spMkLst>
-            <pc:docMk/>
-            <pc:sldMk cId="362923616" sldId="294"/>
-            <ac:spMk id="6" creationId="{00000000-0000-0000-0000-000000000000}"/>
-          </ac:spMkLst>
-        </pc:spChg>
       </pc:sldChg>
       <pc:sldChg chg="add del">
         <pc:chgData name="André-Guy Bruneau" userId="c9f3b82d5570fc32" providerId="LiveId" clId="{C4496A7D-9A64-4B82-9835-F710A7718518}" dt="2026-06-27T15:19:22.228" v="1797"/>
@@ -450,7 +442,7 @@
         </pc:sldMkLst>
       </pc:sldChg>
       <pc:sldChg chg="modSp add mod">
-        <pc:chgData name="André-Guy Bruneau" userId="c9f3b82d5570fc32" providerId="LiveId" clId="{C4496A7D-9A64-4B82-9835-F710A7718518}" dt="2026-06-27T23:23:23.467" v="1817" actId="14100"/>
+        <pc:chgData name="André-Guy Bruneau" userId="c9f3b82d5570fc32" providerId="LiveId" clId="{C4496A7D-9A64-4B82-9835-F710A7718518}" dt="2026-06-28T11:03:40.701" v="1962" actId="20577"/>
         <pc:sldMkLst>
           <pc:docMk/>
           <pc:sldMk cId="1865463153" sldId="305"/>
@@ -463,23 +455,95 @@
             <ac:spMk id="8" creationId="{00000000-0000-0000-0000-000000000000}"/>
           </ac:spMkLst>
         </pc:spChg>
+        <pc:spChg chg="mod">
+          <ac:chgData name="André-Guy Bruneau" userId="c9f3b82d5570fc32" providerId="LiveId" clId="{C4496A7D-9A64-4B82-9835-F710A7718518}" dt="2026-06-28T11:00:57.042" v="1916" actId="122"/>
+          <ac:spMkLst>
+            <pc:docMk/>
+            <pc:sldMk cId="1865463153" sldId="305"/>
+            <ac:spMk id="9" creationId="{00000000-0000-0000-0000-000000000000}"/>
+          </ac:spMkLst>
+        </pc:spChg>
+        <pc:spChg chg="mod">
+          <ac:chgData name="André-Guy Bruneau" userId="c9f3b82d5570fc32" providerId="LiveId" clId="{C4496A7D-9A64-4B82-9835-F710A7718518}" dt="2026-06-28T11:01:33.077" v="1933" actId="20577"/>
+          <ac:spMkLst>
+            <pc:docMk/>
+            <pc:sldMk cId="1865463153" sldId="305"/>
+            <ac:spMk id="15" creationId="{00000000-0000-0000-0000-000000000000}"/>
+          </ac:spMkLst>
+        </pc:spChg>
+        <pc:spChg chg="mod">
+          <ac:chgData name="André-Guy Bruneau" userId="c9f3b82d5570fc32" providerId="LiveId" clId="{C4496A7D-9A64-4B82-9835-F710A7718518}" dt="2026-06-28T11:03:40.701" v="1962" actId="20577"/>
+          <ac:spMkLst>
+            <pc:docMk/>
+            <pc:sldMk cId="1865463153" sldId="305"/>
+            <ac:spMk id="21" creationId="{00000000-0000-0000-0000-000000000000}"/>
+          </ac:spMkLst>
+        </pc:spChg>
       </pc:sldChg>
-      <pc:sldChg chg="add">
-        <pc:chgData name="André-Guy Bruneau" userId="c9f3b82d5570fc32" providerId="LiveId" clId="{C4496A7D-9A64-4B82-9835-F710A7718518}" dt="2026-06-27T15:16:05.976" v="1780"/>
+      <pc:sldChg chg="modSp add mod">
+        <pc:chgData name="André-Guy Bruneau" userId="c9f3b82d5570fc32" providerId="LiveId" clId="{C4496A7D-9A64-4B82-9835-F710A7718518}" dt="2026-06-28T10:59:58.584" v="1911" actId="20577"/>
         <pc:sldMkLst>
           <pc:docMk/>
           <pc:sldMk cId="1750828263" sldId="306"/>
         </pc:sldMkLst>
+        <pc:spChg chg="mod">
+          <ac:chgData name="André-Guy Bruneau" userId="c9f3b82d5570fc32" providerId="LiveId" clId="{C4496A7D-9A64-4B82-9835-F710A7718518}" dt="2026-06-28T10:59:58.584" v="1911" actId="20577"/>
+          <ac:spMkLst>
+            <pc:docMk/>
+            <pc:sldMk cId="1750828263" sldId="306"/>
+            <ac:spMk id="19" creationId="{00000000-0000-0000-0000-000000000000}"/>
+          </ac:spMkLst>
+        </pc:spChg>
       </pc:sldChg>
-      <pc:sldChg chg="add">
-        <pc:chgData name="André-Guy Bruneau" userId="c9f3b82d5570fc32" providerId="LiveId" clId="{C4496A7D-9A64-4B82-9835-F710A7718518}" dt="2026-06-27T15:16:50.381" v="1782"/>
+      <pc:sldChg chg="modSp add mod">
+        <pc:chgData name="André-Guy Bruneau" userId="c9f3b82d5570fc32" providerId="LiveId" clId="{C4496A7D-9A64-4B82-9835-F710A7718518}" dt="2026-06-28T11:08:50.794" v="1970" actId="20577"/>
         <pc:sldMkLst>
           <pc:docMk/>
           <pc:sldMk cId="4009307610" sldId="307"/>
         </pc:sldMkLst>
+        <pc:spChg chg="mod">
+          <ac:chgData name="André-Guy Bruneau" userId="c9f3b82d5570fc32" providerId="LiveId" clId="{C4496A7D-9A64-4B82-9835-F710A7718518}" dt="2026-06-28T11:06:14.828" v="1963" actId="20577"/>
+          <ac:spMkLst>
+            <pc:docMk/>
+            <pc:sldMk cId="4009307610" sldId="307"/>
+            <ac:spMk id="204" creationId="{00000000-0000-0000-0000-000000000000}"/>
+          </ac:spMkLst>
+        </pc:spChg>
+        <pc:spChg chg="mod">
+          <ac:chgData name="André-Guy Bruneau" userId="c9f3b82d5570fc32" providerId="LiveId" clId="{C4496A7D-9A64-4B82-9835-F710A7718518}" dt="2026-06-28T11:06:18.744" v="1964" actId="20577"/>
+          <ac:spMkLst>
+            <pc:docMk/>
+            <pc:sldMk cId="4009307610" sldId="307"/>
+            <ac:spMk id="209" creationId="{00000000-0000-0000-0000-000000000000}"/>
+          </ac:spMkLst>
+        </pc:spChg>
+        <pc:spChg chg="mod">
+          <ac:chgData name="André-Guy Bruneau" userId="c9f3b82d5570fc32" providerId="LiveId" clId="{C4496A7D-9A64-4B82-9835-F710A7718518}" dt="2026-06-28T11:08:42.861" v="1968" actId="20577"/>
+          <ac:spMkLst>
+            <pc:docMk/>
+            <pc:sldMk cId="4009307610" sldId="307"/>
+            <ac:spMk id="214" creationId="{00000000-0000-0000-0000-000000000000}"/>
+          </ac:spMkLst>
+        </pc:spChg>
+        <pc:spChg chg="mod">
+          <ac:chgData name="André-Guy Bruneau" userId="c9f3b82d5570fc32" providerId="LiveId" clId="{C4496A7D-9A64-4B82-9835-F710A7718518}" dt="2026-06-28T11:08:45.673" v="1969" actId="20577"/>
+          <ac:spMkLst>
+            <pc:docMk/>
+            <pc:sldMk cId="4009307610" sldId="307"/>
+            <ac:spMk id="219" creationId="{00000000-0000-0000-0000-000000000000}"/>
+          </ac:spMkLst>
+        </pc:spChg>
+        <pc:spChg chg="mod">
+          <ac:chgData name="André-Guy Bruneau" userId="c9f3b82d5570fc32" providerId="LiveId" clId="{C4496A7D-9A64-4B82-9835-F710A7718518}" dt="2026-06-28T11:08:50.794" v="1970" actId="20577"/>
+          <ac:spMkLst>
+            <pc:docMk/>
+            <pc:sldMk cId="4009307610" sldId="307"/>
+            <ac:spMk id="224" creationId="{00000000-0000-0000-0000-000000000000}"/>
+          </ac:spMkLst>
+        </pc:spChg>
       </pc:sldChg>
       <pc:sldChg chg="modSp add mod">
-        <pc:chgData name="André-Guy Bruneau" userId="c9f3b82d5570fc32" providerId="LiveId" clId="{C4496A7D-9A64-4B82-9835-F710A7718518}" dt="2026-06-27T23:24:28.591" v="1852" actId="20577"/>
+        <pc:chgData name="André-Guy Bruneau" userId="c9f3b82d5570fc32" providerId="LiveId" clId="{C4496A7D-9A64-4B82-9835-F710A7718518}" dt="2026-06-28T11:09:02.122" v="1972" actId="20577"/>
         <pc:sldMkLst>
           <pc:docMk/>
           <pc:sldMk cId="3082900950" sldId="308"/>
@@ -509,7 +573,7 @@
           </ac:spMkLst>
         </pc:spChg>
         <pc:spChg chg="mod">
-          <ac:chgData name="André-Guy Bruneau" userId="c9f3b82d5570fc32" providerId="LiveId" clId="{C4496A7D-9A64-4B82-9835-F710A7718518}" dt="2026-06-27T23:23:53.703" v="1821" actId="20577"/>
+          <ac:chgData name="André-Guy Bruneau" userId="c9f3b82d5570fc32" providerId="LiveId" clId="{C4496A7D-9A64-4B82-9835-F710A7718518}" dt="2026-06-28T11:08:58.165" v="1971" actId="20577"/>
           <ac:spMkLst>
             <pc:docMk/>
             <pc:sldMk cId="3082900950" sldId="308"/>
@@ -517,7 +581,7 @@
           </ac:spMkLst>
         </pc:spChg>
         <pc:spChg chg="mod">
-          <ac:chgData name="André-Guy Bruneau" userId="c9f3b82d5570fc32" providerId="LiveId" clId="{C4496A7D-9A64-4B82-9835-F710A7718518}" dt="2026-06-27T23:23:57.008" v="1822" actId="20577"/>
+          <ac:chgData name="André-Guy Bruneau" userId="c9f3b82d5570fc32" providerId="LiveId" clId="{C4496A7D-9A64-4B82-9835-F710A7718518}" dt="2026-06-28T11:09:02.122" v="1972" actId="20577"/>
           <ac:spMkLst>
             <pc:docMk/>
             <pc:sldMk cId="3082900950" sldId="308"/>
@@ -604,12 +668,28 @@
           </ac:spMkLst>
         </pc:spChg>
       </pc:sldChg>
-      <pc:sldChg chg="add">
-        <pc:chgData name="André-Guy Bruneau" userId="c9f3b82d5570fc32" providerId="LiveId" clId="{C4496A7D-9A64-4B82-9835-F710A7718518}" dt="2026-06-27T15:25:08.854" v="1809"/>
+      <pc:sldChg chg="modSp add mod">
+        <pc:chgData name="André-Guy Bruneau" userId="c9f3b82d5570fc32" providerId="LiveId" clId="{C4496A7D-9A64-4B82-9835-F710A7718518}" dt="2026-06-28T11:12:33.115" v="1984" actId="122"/>
         <pc:sldMkLst>
           <pc:docMk/>
           <pc:sldMk cId="3476847461" sldId="318"/>
         </pc:sldMkLst>
+        <pc:spChg chg="mod">
+          <ac:chgData name="André-Guy Bruneau" userId="c9f3b82d5570fc32" providerId="LiveId" clId="{C4496A7D-9A64-4B82-9835-F710A7718518}" dt="2026-06-28T11:11:46.419" v="1981" actId="122"/>
+          <ac:spMkLst>
+            <pc:docMk/>
+            <pc:sldMk cId="3476847461" sldId="318"/>
+            <ac:spMk id="8" creationId="{00000000-0000-0000-0000-000000000000}"/>
+          </ac:spMkLst>
+        </pc:spChg>
+        <pc:spChg chg="mod">
+          <ac:chgData name="André-Guy Bruneau" userId="c9f3b82d5570fc32" providerId="LiveId" clId="{C4496A7D-9A64-4B82-9835-F710A7718518}" dt="2026-06-28T11:12:33.115" v="1984" actId="122"/>
+          <ac:spMkLst>
+            <pc:docMk/>
+            <pc:sldMk cId="3476847461" sldId="318"/>
+            <ac:spMk id="13" creationId="{00000000-0000-0000-0000-000000000000}"/>
+          </ac:spMkLst>
+        </pc:spChg>
       </pc:sldChg>
       <pc:sldChg chg="modSp add mod">
         <pc:chgData name="André-Guy Bruneau" userId="c9f3b82d5570fc32" providerId="LiveId" clId="{C4496A7D-9A64-4B82-9835-F710A7718518}" dt="2026-06-27T23:30:23.685" v="1870" actId="6549"/>
@@ -655,6 +735,13 @@
             <ac:spMk id="9" creationId="{00000000-0000-0000-0000-000000000000}"/>
           </ac:spMkLst>
         </pc:spChg>
+      </pc:sldChg>
+      <pc:sldChg chg="new del">
+        <pc:chgData name="André-Guy Bruneau" userId="c9f3b82d5570fc32" providerId="LiveId" clId="{C4496A7D-9A64-4B82-9835-F710A7718518}" dt="2026-06-28T11:01:06.944" v="1920" actId="680"/>
+        <pc:sldMkLst>
+          <pc:docMk/>
+          <pc:sldMk cId="632524679" sldId="322"/>
+        </pc:sldMkLst>
       </pc:sldChg>
       <pc:sldChg chg="add del setBg">
         <pc:chgData name="André-Guy Bruneau" userId="c9f3b82d5570fc32" providerId="LiveId" clId="{C4496A7D-9A64-4B82-9835-F710A7718518}" dt="2026-06-27T23:34:45.675" v="1881"/>
@@ -6614,20 +6701,8 @@
                 </a:solidFill>
                 <a:latin typeface="Cambria" pitchFamily="34" charset="0"/>
                 <a:ea typeface="Cambria" pitchFamily="34" charset="-122"/>
-                <a:cs typeface="Cambria" pitchFamily="34" charset="-120"/>
-              </a:rPr>
-              <a:t>La </a:t>
-            </a:r>
-            <a:r>
-              <a:rPr lang="en-US" sz="2100" b="1" dirty="0" err="1">
-                <a:solidFill>
-                  <a:srgbClr val="F2A24E"/>
-                </a:solidFill>
-                <a:latin typeface="Cambria" pitchFamily="34" charset="0"/>
-                <a:ea typeface="Cambria" pitchFamily="34" charset="-122"/>
-                <a:cs typeface="Cambria" pitchFamily="34" charset="-120"/>
-              </a:rPr>
-              <a:t>Prière</a:t>
+              </a:rPr>
+              <a:t>Vallée de la Vision</a:t>
             </a:r>
             <a:endParaRPr lang="en-US" sz="2100" dirty="0"/>
           </a:p>
@@ -7105,7 +7180,7 @@
           <a:bodyPr wrap="square" rtlCol="0" anchor="t"/>
           <a:lstStyle/>
           <a:p>
-            <a:pPr marL="0" indent="0" algn="l">
+            <a:pPr marL="0" indent="0" algn="ctr">
               <a:lnSpc>
                 <a:spcPts val="1650"/>
               </a:lnSpc>
@@ -7184,7 +7259,7 @@
             </a:endParaRPr>
           </a:p>
           <a:p>
-            <a:pPr marL="0" indent="0" algn="l">
+            <a:pPr marL="0" indent="0" algn="ctr">
               <a:lnSpc>
                 <a:spcPts val="1650"/>
               </a:lnSpc>
@@ -7379,7 +7454,7 @@
           <a:bodyPr wrap="square" rtlCol="0" anchor="t"/>
           <a:lstStyle/>
           <a:p>
-            <a:pPr marL="0" indent="0" algn="l">
+            <a:pPr marL="0" indent="0" algn="ctr">
               <a:lnSpc>
                 <a:spcPts val="1650"/>
               </a:lnSpc>
@@ -7398,16 +7473,16 @@
             </a:r>
           </a:p>
           <a:p>
-            <a:pPr algn="l">
+            <a:pPr algn="just">
               <a:lnSpc>
                 <a:spcPts val="800"/>
               </a:lnSpc>
               <a:buNone/>
             </a:pPr>
-            <a:endParaRPr lang="fr-CA" sz="1400"/>
-          </a:p>
-          <a:p>
-            <a:pPr marL="0" indent="0" algn="l">
+            <a:endParaRPr lang="fr-CA" sz="1400" dirty="0"/>
+          </a:p>
+          <a:p>
+            <a:pPr marL="0" indent="0" algn="ctr">
               <a:lnSpc>
                 <a:spcPts val="1650"/>
               </a:lnSpc>
@@ -7422,7 +7497,102 @@
                 <a:ea typeface="Cambria" pitchFamily="34" charset="-122"/>
                 <a:cs typeface="Cambria" pitchFamily="34" charset="-120"/>
               </a:rPr>
-              <a:t>W. Perkins, W. Ames, R. Sibbes, J. Preston, J. Owen, T. Goodwin, R. Baxter, J. Burroughs, T. Manton, A. Burges, E. Reynolds, W. Bridge, J. Bunyan, T. Watson, J. Flavel, S. Charnock, T. Brooks, M. Henry.</a:t>
+              <a:t>W. Perkins, W. Ames, R. Sibbes, </a:t>
+            </a:r>
+          </a:p>
+          <a:p>
+            <a:pPr marL="0" indent="0" algn="ctr">
+              <a:lnSpc>
+                <a:spcPts val="1650"/>
+              </a:lnSpc>
+              <a:buNone/>
+            </a:pPr>
+            <a:r>
+              <a:rPr lang="fr-CA" sz="1400" dirty="0">
+                <a:solidFill>
+                  <a:srgbClr val="F5EFE4"/>
+                </a:solidFill>
+                <a:latin typeface="Cambria" pitchFamily="34" charset="0"/>
+                <a:ea typeface="Cambria" pitchFamily="34" charset="-122"/>
+                <a:cs typeface="Cambria" pitchFamily="34" charset="-120"/>
+              </a:rPr>
+              <a:t>J. Preston, J. Owen, T. Goodwin, </a:t>
+            </a:r>
+          </a:p>
+          <a:p>
+            <a:pPr marL="0" indent="0" algn="ctr">
+              <a:lnSpc>
+                <a:spcPts val="1650"/>
+              </a:lnSpc>
+              <a:buNone/>
+            </a:pPr>
+            <a:r>
+              <a:rPr lang="fr-CA" sz="1400" dirty="0">
+                <a:solidFill>
+                  <a:srgbClr val="F5EFE4"/>
+                </a:solidFill>
+                <a:latin typeface="Cambria" pitchFamily="34" charset="0"/>
+                <a:ea typeface="Cambria" pitchFamily="34" charset="-122"/>
+                <a:cs typeface="Cambria" pitchFamily="34" charset="-120"/>
+              </a:rPr>
+              <a:t>R. Baxter, J. Burroughs, T. Manton, </a:t>
+            </a:r>
+          </a:p>
+          <a:p>
+            <a:pPr marL="0" indent="0" algn="ctr">
+              <a:lnSpc>
+                <a:spcPts val="1650"/>
+              </a:lnSpc>
+              <a:buNone/>
+            </a:pPr>
+            <a:r>
+              <a:rPr lang="fr-CA" sz="1400" dirty="0">
+                <a:solidFill>
+                  <a:srgbClr val="F5EFE4"/>
+                </a:solidFill>
+                <a:latin typeface="Cambria" pitchFamily="34" charset="0"/>
+                <a:ea typeface="Cambria" pitchFamily="34" charset="-122"/>
+                <a:cs typeface="Cambria" pitchFamily="34" charset="-120"/>
+              </a:rPr>
+              <a:t>A. Burges, E. Reynolds, W. Bridge, </a:t>
+            </a:r>
+          </a:p>
+          <a:p>
+            <a:pPr marL="0" indent="0" algn="ctr">
+              <a:lnSpc>
+                <a:spcPts val="1650"/>
+              </a:lnSpc>
+              <a:buNone/>
+            </a:pPr>
+            <a:r>
+              <a:rPr lang="fr-CA" sz="1400" dirty="0">
+                <a:solidFill>
+                  <a:srgbClr val="F5EFE4"/>
+                </a:solidFill>
+                <a:latin typeface="Cambria" pitchFamily="34" charset="0"/>
+                <a:ea typeface="Cambria" pitchFamily="34" charset="-122"/>
+                <a:cs typeface="Cambria" pitchFamily="34" charset="-120"/>
+              </a:rPr>
+              <a:t>J. Bunyan, T. Watson, J. Flavel, </a:t>
+            </a:r>
+          </a:p>
+          <a:p>
+            <a:pPr marL="0" indent="0" algn="ctr">
+              <a:lnSpc>
+                <a:spcPts val="1650"/>
+              </a:lnSpc>
+              <a:buNone/>
+            </a:pPr>
+            <a:r>
+              <a:rPr lang="fr-CA" sz="1400" dirty="0">
+                <a:solidFill>
+                  <a:srgbClr val="F5EFE4"/>
+                </a:solidFill>
+                <a:latin typeface="Cambria" pitchFamily="34" charset="0"/>
+                <a:ea typeface="Cambria" pitchFamily="34" charset="-122"/>
+                <a:cs typeface="Cambria" pitchFamily="34" charset="-120"/>
+              </a:rPr>
+              <a:t>S. Charnock, T. Brooks, M. Henry.</a:t>
             </a:r>
           </a:p>
         </p:txBody>
@@ -7568,7 +7738,7 @@
           <a:bodyPr wrap="square" rtlCol="0" anchor="t"/>
           <a:lstStyle/>
           <a:p>
-            <a:pPr marL="0" indent="0" algn="l">
+            <a:pPr marL="0" indent="0" algn="ctr">
               <a:lnSpc>
                 <a:spcPts val="1650"/>
               </a:lnSpc>
@@ -7583,20 +7753,39 @@
                 <a:ea typeface="Cambria" pitchFamily="34" charset="-122"/>
                 <a:cs typeface="Cambria" pitchFamily="34" charset="-120"/>
               </a:rPr>
-              <a:t>Prédication expositive, Piété expérientielle, Mortification du péché, Examen de soi et méditation, Lecture de la providence, Assurance du Salut, Foyer comme petite église.</a:t>
-            </a:r>
-          </a:p>
-          <a:p>
-            <a:pPr algn="l">
+              <a:t>Prédication expositive, Piété expérientielle, Mortification du péché, Examen de soi et méditation, Assurance du Salut, </a:t>
+            </a:r>
+          </a:p>
+          <a:p>
+            <a:pPr marL="0" indent="0" algn="ctr">
+              <a:lnSpc>
+                <a:spcPts val="1650"/>
+              </a:lnSpc>
+              <a:buNone/>
+            </a:pPr>
+            <a:r>
+              <a:rPr lang="fr-CA" sz="1400" dirty="0">
+                <a:solidFill>
+                  <a:srgbClr val="F5EFE4"/>
+                </a:solidFill>
+                <a:latin typeface="Cambria" pitchFamily="34" charset="0"/>
+                <a:ea typeface="Cambria" pitchFamily="34" charset="-122"/>
+                <a:cs typeface="Cambria" pitchFamily="34" charset="-120"/>
+              </a:rPr>
+              <a:t>Foyer comme petite église.</a:t>
+            </a:r>
+          </a:p>
+          <a:p>
+            <a:pPr algn="just">
               <a:lnSpc>
                 <a:spcPts val="800"/>
               </a:lnSpc>
               <a:buNone/>
             </a:pPr>
-            <a:endParaRPr lang="fr-CA" sz="1400"/>
-          </a:p>
-          <a:p>
-            <a:pPr marL="0" indent="0" algn="l">
+            <a:endParaRPr lang="fr-CA" sz="1400" dirty="0"/>
+          </a:p>
+          <a:p>
+            <a:pPr marL="0" indent="0" algn="ctr">
               <a:lnSpc>
                 <a:spcPts val="1650"/>
               </a:lnSpc>
@@ -8404,6 +8593,22 @@
                 <a:cs typeface="Cambria"/>
               </a:rPr>
             </a:br>
+            <a:endParaRPr lang="fr-CA" sz="1400" dirty="0">
+              <a:solidFill>
+                <a:srgbClr val="F5EFE4"/>
+              </a:solidFill>
+              <a:latin typeface="Cambria"/>
+              <a:ea typeface="Cambria"/>
+              <a:cs typeface="Cambria"/>
+            </a:endParaRPr>
+          </a:p>
+          <a:p>
+            <a:pPr algn="ctr">
+              <a:lnSpc>
+                <a:spcPts val="1700"/>
+              </a:lnSpc>
+              <a:buNone/>
+            </a:pPr>
             <a:r>
               <a:rPr lang="fr-CA" sz="1400" dirty="0">
                 <a:solidFill>
@@ -8612,6 +8817,22 @@
                 <a:cs typeface="Cambria"/>
               </a:rPr>
             </a:br>
+            <a:endParaRPr lang="fr-CA" sz="1400" dirty="0">
+              <a:solidFill>
+                <a:srgbClr val="F5EFE4"/>
+              </a:solidFill>
+              <a:latin typeface="Cambria"/>
+              <a:ea typeface="Cambria"/>
+              <a:cs typeface="Cambria"/>
+            </a:endParaRPr>
+          </a:p>
+          <a:p>
+            <a:pPr algn="ctr">
+              <a:lnSpc>
+                <a:spcPts val="1700"/>
+              </a:lnSpc>
+              <a:buNone/>
+            </a:pPr>
             <a:r>
               <a:rPr lang="fr-CA" sz="1400" dirty="0">
                 <a:solidFill>
@@ -8818,6 +9039,38 @@
               </a:lnSpc>
               <a:buNone/>
             </a:pPr>
+            <a:endParaRPr lang="fr-CA" sz="1400" dirty="0">
+              <a:solidFill>
+                <a:srgbClr val="F5EFE4"/>
+              </a:solidFill>
+              <a:latin typeface="Cambria"/>
+              <a:ea typeface="Cambria"/>
+              <a:cs typeface="Cambria"/>
+            </a:endParaRPr>
+          </a:p>
+          <a:p>
+            <a:pPr algn="ctr">
+              <a:lnSpc>
+                <a:spcPts val="1700"/>
+              </a:lnSpc>
+              <a:buNone/>
+            </a:pPr>
+            <a:endParaRPr lang="fr-CA" sz="1400" dirty="0">
+              <a:solidFill>
+                <a:srgbClr val="F5EFE4"/>
+              </a:solidFill>
+              <a:latin typeface="Cambria"/>
+              <a:ea typeface="Cambria"/>
+              <a:cs typeface="Cambria"/>
+            </a:endParaRPr>
+          </a:p>
+          <a:p>
+            <a:pPr algn="ctr">
+              <a:lnSpc>
+                <a:spcPts val="1700"/>
+              </a:lnSpc>
+              <a:buNone/>
+            </a:pPr>
             <a:r>
               <a:rPr lang="fr-CA" sz="1400" dirty="0">
                 <a:solidFill>
@@ -9024,6 +9277,38 @@
               </a:lnSpc>
               <a:buNone/>
             </a:pPr>
+            <a:endParaRPr lang="fr-CA" sz="1400" dirty="0">
+              <a:solidFill>
+                <a:srgbClr val="F5EFE4"/>
+              </a:solidFill>
+              <a:latin typeface="Cambria"/>
+              <a:ea typeface="Cambria"/>
+              <a:cs typeface="Cambria"/>
+            </a:endParaRPr>
+          </a:p>
+          <a:p>
+            <a:pPr algn="ctr">
+              <a:lnSpc>
+                <a:spcPts val="1700"/>
+              </a:lnSpc>
+              <a:buNone/>
+            </a:pPr>
+            <a:endParaRPr lang="fr-CA" sz="1400" dirty="0">
+              <a:solidFill>
+                <a:srgbClr val="F5EFE4"/>
+              </a:solidFill>
+              <a:latin typeface="Cambria"/>
+              <a:ea typeface="Cambria"/>
+              <a:cs typeface="Cambria"/>
+            </a:endParaRPr>
+          </a:p>
+          <a:p>
+            <a:pPr algn="ctr">
+              <a:lnSpc>
+                <a:spcPts val="1700"/>
+              </a:lnSpc>
+              <a:buNone/>
+            </a:pPr>
             <a:r>
               <a:rPr lang="fr-CA" sz="1400" dirty="0">
                 <a:solidFill>
@@ -9222,6 +9507,38 @@
               </a:rPr>
               <a:t>Toute l'œuvre du salut vise la gloire de Dieu, seul digne d'adoration.</a:t>
             </a:r>
+          </a:p>
+          <a:p>
+            <a:pPr algn="ctr">
+              <a:lnSpc>
+                <a:spcPts val="1700"/>
+              </a:lnSpc>
+              <a:buNone/>
+            </a:pPr>
+            <a:endParaRPr lang="fr-CA" sz="1400" dirty="0">
+              <a:solidFill>
+                <a:srgbClr val="F5EFE4"/>
+              </a:solidFill>
+              <a:latin typeface="Cambria"/>
+              <a:ea typeface="Cambria"/>
+              <a:cs typeface="Cambria"/>
+            </a:endParaRPr>
+          </a:p>
+          <a:p>
+            <a:pPr algn="ctr">
+              <a:lnSpc>
+                <a:spcPts val="1700"/>
+              </a:lnSpc>
+              <a:buNone/>
+            </a:pPr>
+            <a:endParaRPr lang="fr-CA" sz="1400" dirty="0">
+              <a:solidFill>
+                <a:srgbClr val="F5EFE4"/>
+              </a:solidFill>
+              <a:latin typeface="Cambria"/>
+              <a:ea typeface="Cambria"/>
+              <a:cs typeface="Cambria"/>
+            </a:endParaRPr>
           </a:p>
           <a:p>
             <a:pPr algn="ctr">
@@ -10405,6 +10722,22 @@
               </a:lnSpc>
               <a:buNone/>
             </a:pPr>
+            <a:endParaRPr lang="fr-CA" sz="1400" dirty="0">
+              <a:solidFill>
+                <a:srgbClr val="F5EFE4"/>
+              </a:solidFill>
+              <a:latin typeface="Cambria"/>
+              <a:ea typeface="Cambria"/>
+              <a:cs typeface="Cambria"/>
+            </a:endParaRPr>
+          </a:p>
+          <a:p>
+            <a:pPr algn="ctr">
+              <a:lnSpc>
+                <a:spcPts val="1700"/>
+              </a:lnSpc>
+              <a:buNone/>
+            </a:pPr>
             <a:r>
               <a:rPr lang="fr-CA" sz="1400" dirty="0">
                 <a:solidFill>
@@ -10603,6 +10936,22 @@
               </a:rPr>
               <a:t>Ceux que Dieu sauve persévèrent dans la foi et ne se perdront jamais.</a:t>
             </a:r>
+          </a:p>
+          <a:p>
+            <a:pPr algn="ctr">
+              <a:lnSpc>
+                <a:spcPts val="1700"/>
+              </a:lnSpc>
+              <a:buNone/>
+            </a:pPr>
+            <a:endParaRPr lang="fr-CA" sz="1400" dirty="0">
+              <a:solidFill>
+                <a:srgbClr val="F5EFE4"/>
+              </a:solidFill>
+              <a:latin typeface="Cambria"/>
+              <a:ea typeface="Cambria"/>
+              <a:cs typeface="Cambria"/>
+            </a:endParaRPr>
           </a:p>
           <a:p>
             <a:pPr algn="ctr">
@@ -10915,7 +11264,7 @@
         <p:spPr>
           <a:xfrm>
             <a:off x="850900" y="3454400"/>
-            <a:ext cx="4610100" cy="2362200"/>
+            <a:ext cx="4610100" cy="2628392"/>
           </a:xfrm>
           <a:prstGeom prst="rect">
             <a:avLst/>
@@ -10926,6 +11275,45 @@
         <p:txBody>
           <a:bodyPr wrap="square" rtlCol="0" anchor="t"/>
           <a:lstStyle/>
+          <a:p>
+            <a:pPr marL="0" indent="0" algn="ctr">
+              <a:lnSpc>
+                <a:spcPts val="2000"/>
+              </a:lnSpc>
+              <a:buNone/>
+            </a:pPr>
+            <a:r>
+              <a:rPr lang="en-US" sz="1450" dirty="0">
+                <a:solidFill>
+                  <a:srgbClr val="F5EFE4"/>
+                </a:solidFill>
+                <a:latin typeface="Cambria" pitchFamily="34" charset="0"/>
+                <a:ea typeface="Cambria" pitchFamily="34" charset="-122"/>
+                <a:cs typeface="Cambria" pitchFamily="34" charset="-120"/>
+              </a:rPr>
+              <a:t>Recueil de prières et de méditations puritaines compilé par Arthur Bennett (Banner of Truth, 1975), traduit en français par Timothée Wenger </a:t>
+            </a:r>
+          </a:p>
+          <a:p>
+            <a:pPr marL="0" indent="0" algn="ctr">
+              <a:lnSpc>
+                <a:spcPts val="2000"/>
+              </a:lnSpc>
+              <a:buNone/>
+            </a:pPr>
+            <a:r>
+              <a:rPr lang="en-US" sz="1450" dirty="0">
+                <a:solidFill>
+                  <a:srgbClr val="F5EFE4"/>
+                </a:solidFill>
+                <a:latin typeface="Cambria" pitchFamily="34" charset="0"/>
+                <a:ea typeface="Cambria" pitchFamily="34" charset="-122"/>
+                <a:cs typeface="Cambria" pitchFamily="34" charset="-120"/>
+              </a:rPr>
+              <a:t>(Impact Héritage, Trois-Rivières, 2023).</a:t>
+            </a:r>
+            <a:endParaRPr lang="en-US" sz="1450" dirty="0"/>
+          </a:p>
           <a:p>
             <a:pPr marL="0" indent="0" algn="l">
               <a:lnSpc>
@@ -10933,51 +11321,10 @@
               </a:lnSpc>
               <a:buNone/>
             </a:pPr>
-            <a:r>
-              <a:rPr lang="en-US" sz="1450" dirty="0">
-                <a:solidFill>
-                  <a:srgbClr val="F5EFE4"/>
-                </a:solidFill>
-                <a:latin typeface="Cambria" pitchFamily="34" charset="0"/>
-                <a:ea typeface="Cambria" pitchFamily="34" charset="-122"/>
-                <a:cs typeface="Cambria" pitchFamily="34" charset="-120"/>
-              </a:rPr>
-              <a:t>Recueil de prières et de méditations puritaines compilé par Arthur Bennett (Banner of Truth, 1975), traduit en français par Timothée Wenger </a:t>
-            </a:r>
-            <a:br>
-              <a:rPr lang="en-US" sz="1450" dirty="0">
-                <a:solidFill>
-                  <a:srgbClr val="F5EFE4"/>
-                </a:solidFill>
-                <a:latin typeface="Cambria" pitchFamily="34" charset="0"/>
-                <a:ea typeface="Cambria" pitchFamily="34" charset="-122"/>
-                <a:cs typeface="Cambria" pitchFamily="34" charset="-120"/>
-              </a:rPr>
-            </a:br>
-            <a:r>
-              <a:rPr lang="en-US" sz="1450" dirty="0">
-                <a:solidFill>
-                  <a:srgbClr val="F5EFE4"/>
-                </a:solidFill>
-                <a:latin typeface="Cambria" pitchFamily="34" charset="0"/>
-                <a:ea typeface="Cambria" pitchFamily="34" charset="-122"/>
-                <a:cs typeface="Cambria" pitchFamily="34" charset="-120"/>
-              </a:rPr>
-              <a:t>(Impact Héritage, Trois-Rivières, 2023).</a:t>
-            </a:r>
             <a:endParaRPr lang="en-US" sz="1450" dirty="0"/>
           </a:p>
           <a:p>
-            <a:pPr marL="0" indent="0" algn="l">
-              <a:lnSpc>
-                <a:spcPts val="2000"/>
-              </a:lnSpc>
-              <a:buNone/>
-            </a:pPr>
-            <a:endParaRPr lang="en-US" sz="1450" dirty="0"/>
-          </a:p>
-          <a:p>
-            <a:pPr marL="0" indent="0" algn="l">
+            <a:pPr marL="0" indent="0" algn="ctr">
               <a:lnSpc>
                 <a:spcPts val="2000"/>
               </a:lnSpc>
@@ -11084,7 +11431,7 @@
         <p:spPr>
           <a:xfrm>
             <a:off x="6629400" y="3454400"/>
-            <a:ext cx="4610100" cy="2362200"/>
+            <a:ext cx="4610100" cy="2602992"/>
           </a:xfrm>
           <a:prstGeom prst="rect">
             <a:avLst/>
@@ -11095,6 +11442,26 @@
         <p:txBody>
           <a:bodyPr wrap="square" rtlCol="0" anchor="t"/>
           <a:lstStyle/>
+          <a:p>
+            <a:pPr marL="0" indent="0" algn="ctr">
+              <a:lnSpc>
+                <a:spcPts val="2000"/>
+              </a:lnSpc>
+              <a:buNone/>
+            </a:pPr>
+            <a:r>
+              <a:rPr lang="en-US" sz="1450" dirty="0">
+                <a:solidFill>
+                  <a:srgbClr val="F5EFE4"/>
+                </a:solidFill>
+                <a:latin typeface="Cambria" pitchFamily="34" charset="0"/>
+                <a:ea typeface="Cambria" pitchFamily="34" charset="-122"/>
+                <a:cs typeface="Cambria" pitchFamily="34" charset="-120"/>
+              </a:rPr>
+              <a:t>Une collection de prières organisées selon l'expérience chrétienne : création et providence, rédemption en Christ, repentance et confession du péché, soif de grâce, communion et service.</a:t>
+            </a:r>
+            <a:endParaRPr lang="en-US" sz="1450" dirty="0"/>
+          </a:p>
           <a:p>
             <a:pPr marL="0" indent="0" algn="l">
               <a:lnSpc>
@@ -11102,30 +11469,29 @@
               </a:lnSpc>
               <a:buNone/>
             </a:pPr>
-            <a:r>
-              <a:rPr lang="en-US" sz="1450" dirty="0">
-                <a:solidFill>
-                  <a:srgbClr val="F5EFE4"/>
-                </a:solidFill>
-                <a:latin typeface="Cambria" pitchFamily="34" charset="0"/>
-                <a:ea typeface="Cambria" pitchFamily="34" charset="-122"/>
-                <a:cs typeface="Cambria" pitchFamily="34" charset="-120"/>
-              </a:rPr>
-              <a:t>Une collection de prières organisées selon l'expérience chrétienne : création et providence, rédemption en Christ, repentance et confession du péché, soif de grâce, communion et service.</a:t>
-            </a:r>
             <a:endParaRPr lang="en-US" sz="1450" dirty="0"/>
           </a:p>
           <a:p>
-            <a:pPr marL="0" indent="0" algn="l">
+            <a:pPr marL="0" indent="0" algn="ctr">
               <a:lnSpc>
                 <a:spcPts val="2000"/>
               </a:lnSpc>
               <a:buNone/>
             </a:pPr>
-            <a:endParaRPr lang="en-US" sz="1450" dirty="0"/>
-          </a:p>
-          <a:p>
-            <a:pPr marL="0" indent="0" algn="l">
+            <a:r>
+              <a:rPr lang="en-US" sz="1450" dirty="0">
+                <a:solidFill>
+                  <a:srgbClr val="F5EFE4"/>
+                </a:solidFill>
+                <a:latin typeface="Cambria" pitchFamily="34" charset="0"/>
+                <a:ea typeface="Cambria" pitchFamily="34" charset="-122"/>
+                <a:cs typeface="Cambria" pitchFamily="34" charset="-120"/>
+              </a:rPr>
+              <a:t>Son but : nourrir la prière personnelle d'une théologie biblique dense. </a:t>
+            </a:r>
+          </a:p>
+          <a:p>
+            <a:pPr marL="0" indent="0" algn="ctr">
               <a:lnSpc>
                 <a:spcPts val="2000"/>
               </a:lnSpc>
@@ -11140,45 +11506,7 @@
                 <a:ea typeface="Cambria" pitchFamily="34" charset="-122"/>
                 <a:cs typeface="Cambria" pitchFamily="34" charset="-120"/>
               </a:rPr>
-              <a:t>Son but : nourrir la prière personnelle d'une théologie biblique dense. </a:t>
-            </a:r>
-          </a:p>
-          <a:p>
-            <a:pPr marL="0" indent="0" algn="l">
-              <a:lnSpc>
-                <a:spcPts val="2000"/>
-              </a:lnSpc>
-              <a:buNone/>
-            </a:pPr>
-            <a:r>
-              <a:rPr lang="en-US" sz="1450" dirty="0">
-                <a:solidFill>
-                  <a:srgbClr val="F5EFE4"/>
-                </a:solidFill>
-                <a:latin typeface="Cambria" pitchFamily="34" charset="0"/>
-                <a:ea typeface="Cambria" pitchFamily="34" charset="-122"/>
-                <a:cs typeface="Cambria" pitchFamily="34" charset="-120"/>
-              </a:rPr>
-              <a:t>Autorité dérivée : une aide à la dévotion, jamais l'Écriture (Sola Scriptura). </a:t>
-            </a:r>
-          </a:p>
-          <a:p>
-            <a:pPr marL="0" indent="0" algn="l">
-              <a:lnSpc>
-                <a:spcPts val="2000"/>
-              </a:lnSpc>
-              <a:buNone/>
-            </a:pPr>
-            <a:r>
-              <a:rPr lang="en-US" sz="1450" dirty="0">
-                <a:solidFill>
-                  <a:srgbClr val="F5EFE4"/>
-                </a:solidFill>
-                <a:latin typeface="Cambria" pitchFamily="34" charset="0"/>
-                <a:ea typeface="Cambria" pitchFamily="34" charset="-122"/>
-                <a:cs typeface="Cambria" pitchFamily="34" charset="-120"/>
-              </a:rPr>
-              <a:t>La prière-titre ouvre et nomme tout le recueil.</a:t>
+              <a:t>Autorité dérivée : une aide à la dévotion, jamais l'Écriture (Sola Scriptura). La prière-titre ouvre et nomme tout le recueil.</a:t>
             </a:r>
             <a:endParaRPr lang="en-US" sz="1450" dirty="0"/>
           </a:p>
